--- a/classes/parte-5-explotacion-de-sistemas-y-binarios/118-debugging-con-gdb-y-pwndbg/clase-118-presentacion.pptx
+++ b/classes/parte-5-explotacion-de-sistemas-y-binarios/118-debugging-con-gdb-y-pwndbg/clase-118-presentacion.pptx
@@ -17,6 +17,9 @@
     <p:sldId id="265" r:id="rId16"/>
     <p:sldId id="266" r:id="rId17"/>
     <p:sldId id="267" r:id="rId18"/>
+    <p:sldId id="268" r:id="rId19"/>
+    <p:sldId id="269" r:id="rId20"/>
+    <p:sldId id="270" r:id="rId21"/>
   </p:sldIdLst>
   <p:sldSz cx="9144000" cy="6858000" type="screen4x3"/>
   <p:notesSz cx="6858000" cy="9144000"/>
@@ -3198,7 +3201,7 @@
                   <a:srgbClr val="0B3D2E"/>
                 </a:solidFill>
               </a:rPr>
-              <a:t>⚠️ Errores comunes</a:t>
+              <a:t>✍️ Ejercicios</a:t>
             </a:r>
           </a:p>
         </p:txBody>
@@ -3236,67 +3239,82 @@
                   <a:srgbClr val="22282E"/>
                 </a:solidFill>
               </a:rPr>
-              <a:t>•  pwndbg no aparece — source no cargado; revisa ~/.gdbinit o reejecuta setup.sh</a:t>
-            </a:r>
-          </a:p>
-          <a:p>
-            <a:pPr>
-              <a:spcAft>
-                <a:spcPts val="600"/>
-              </a:spcAft>
-            </a:pPr>
-            <a:r>
-              <a:rPr sz="1500">
-                <a:solidFill>
-                  <a:srgbClr val="22282E"/>
-                </a:solidFill>
-              </a:rPr>
-              <a:t>•  cyclic -l da "not found" — Pasaste el valor equivocado; usa el que quedó en RIP/RSP</a:t>
-            </a:r>
-          </a:p>
-          <a:p>
-            <a:pPr>
-              <a:spcAft>
-                <a:spcPts val="600"/>
-              </a:spcAft>
-            </a:pPr>
-            <a:r>
-              <a:rPr sz="1500">
-                <a:solidFill>
-                  <a:srgbClr val="22282E"/>
-                </a:solidFill>
-              </a:rPr>
-              <a:t>•  Direcciones cambian cada corrida — ASLR activo; desactívalo o depura dentro de GDB</a:t>
-            </a:r>
-          </a:p>
-          <a:p>
-            <a:pPr>
-              <a:spcAft>
-                <a:spcPts val="600"/>
-              </a:spcAft>
-            </a:pPr>
-            <a:r>
-              <a:rPr sz="1500">
-                <a:solidFill>
-                  <a:srgbClr val="22282E"/>
-                </a:solidFill>
-              </a:rPr>
-              <a:t>•  x/s imprime basura — Formato incorrecto; ese puntero no apunta a una cadena</a:t>
-            </a:r>
-          </a:p>
-          <a:p>
-            <a:pPr>
-              <a:spcAft>
-                <a:spcPts val="600"/>
-              </a:spcAft>
-            </a:pPr>
-            <a:r>
-              <a:rPr sz="1500">
-                <a:solidFill>
-                  <a:srgbClr val="22282E"/>
-                </a:solidFill>
-              </a:rPr>
-              <a:t>•  El breakpoint nunca dispara — Símbolo inexistente o binario recompilado; rompe por dirección</a:t>
+              <a:t>•  Muestra los 8 primeros qwords del stack con un solo comando x/.</a:t>
+            </a:r>
+          </a:p>
+          <a:p>
+            <a:pPr>
+              <a:spcAft>
+                <a:spcPts val="600"/>
+              </a:spcAft>
+            </a:pPr>
+            <a:r>
+              <a:rPr sz="1500">
+                <a:solidFill>
+                  <a:srgbClr val="22282E"/>
+                </a:solidFill>
+              </a:rPr>
+              <a:t>•  Coloca un watchpoint sobre buf y observa cuándo se sobreescribe.</a:t>
+            </a:r>
+          </a:p>
+          <a:p>
+            <a:pPr>
+              <a:spcAft>
+                <a:spcPts val="600"/>
+              </a:spcAft>
+            </a:pPr>
+            <a:r>
+              <a:rPr sz="1500">
+                <a:solidFill>
+                  <a:srgbClr val="22282E"/>
+                </a:solidFill>
+              </a:rPr>
+              <a:t>•  Usa search para encontrar la cadena "win" en memoria.</a:t>
+            </a:r>
+          </a:p>
+          <a:p>
+            <a:pPr>
+              <a:spcAft>
+                <a:spcPts val="600"/>
+              </a:spcAft>
+            </a:pPr>
+            <a:r>
+              <a:rPr sz="1500">
+                <a:solidFill>
+                  <a:srgbClr val="22282E"/>
+                </a:solidFill>
+              </a:rPr>
+              <a:t>•  Desensambla vuln con disassemble vuln e identifica el call gets.</a:t>
+            </a:r>
+          </a:p>
+          <a:p>
+            <a:pPr>
+              <a:spcAft>
+                <a:spcPts val="600"/>
+              </a:spcAft>
+            </a:pPr>
+            <a:r>
+              <a:rPr sz="1500">
+                <a:solidFill>
+                  <a:srgbClr val="22282E"/>
+                </a:solidFill>
+              </a:rPr>
+              <a:t>•  Explica la diferencia entre stepi y nexti con call.</a:t>
+            </a:r>
+          </a:p>
+          <a:p>
+            <a:pPr>
+              <a:spcAft>
+                <a:spcPts val="600"/>
+              </a:spcAft>
+            </a:pPr>
+            <a:r>
+              <a:rPr sz="1500">
+                <a:solidFill>
+                  <a:srgbClr val="22282E"/>
+                </a:solidFill>
+              </a:rPr>
+              <a:t>•  Guarda un script .gdbinit con tus breakpoints habituales.</a:t>
             </a:r>
           </a:p>
         </p:txBody>
@@ -3347,7 +3365,7 @@
                   <a:srgbClr val="0B3D2E"/>
                 </a:solidFill>
               </a:rPr>
-              <a:t>❓ Preguntas frecuentes</a:t>
+              <a:t>📝 Reto verificable</a:t>
             </a:r>
           </a:p>
         </p:txBody>
@@ -3385,67 +3403,52 @@
                   <a:srgbClr val="22282E"/>
                 </a:solidFill>
               </a:rPr>
-              <a:t>•  ❓ ¿pwndbg, GEF o peda? Cualquiera sirve; pwndbg es el más usado hoy. No mezcles dos a la vez.</a:t>
-            </a:r>
-          </a:p>
-          <a:p>
-            <a:pPr>
-              <a:spcAft>
-                <a:spcPts val="600"/>
-              </a:spcAft>
-            </a:pPr>
-            <a:r>
-              <a:rPr sz="1500">
-                <a:solidFill>
-                  <a:srgbClr val="22282E"/>
-                </a:solidFill>
-              </a:rPr>
-              <a:t>•  ❓ ¿Por qué desactivo ASLR para aprender? Para que las direcciones sean estables entre corridas.</a:t>
-            </a:r>
-          </a:p>
-          <a:p>
-            <a:pPr>
-              <a:spcAft>
-                <a:spcPts val="600"/>
-              </a:spcAft>
-            </a:pPr>
-            <a:r>
-              <a:rPr sz="1500">
-                <a:solidFill>
-                  <a:srgbClr val="22282E"/>
-                </a:solidFill>
-              </a:rPr>
-              <a:t>•  En la explotación real lo tratarás como obstáculo (clases 122+).</a:t>
-            </a:r>
-          </a:p>
-          <a:p>
-            <a:pPr>
-              <a:spcAft>
-                <a:spcPts val="600"/>
-              </a:spcAft>
-            </a:pPr>
-            <a:r>
-              <a:rPr sz="1500">
-                <a:solidFill>
-                  <a:srgbClr val="22282E"/>
-                </a:solidFill>
-              </a:rPr>
-              <a:t>•  ❓ ¿gets es realista? Es un ejemplo didáctico; en binarios reales verás strcpy, sprintf,</a:t>
-            </a:r>
-          </a:p>
-          <a:p>
-            <a:pPr>
-              <a:spcAft>
-                <a:spcPts val="600"/>
-              </a:spcAft>
-            </a:pPr>
-            <a:r>
-              <a:rPr sz="1500">
-                <a:solidFill>
-                  <a:srgbClr val="22282E"/>
-                </a:solidFill>
-              </a:rPr>
-              <a:t>•  read mal acotados, etc.</a:t>
+              <a:t>•  Usando cyclic, determina el offset exacto (en bytes) desde el inicio de buf hasta la dirección de</a:t>
+            </a:r>
+          </a:p>
+          <a:p>
+            <a:pPr>
+              <a:spcAft>
+                <a:spcPts val="600"/>
+              </a:spcAft>
+            </a:pPr>
+            <a:r>
+              <a:rPr sz="1500">
+                <a:solidFill>
+                  <a:srgbClr val="22282E"/>
+                </a:solidFill>
+              </a:rPr>
+              <a:t>•  retorno de vuln.</a:t>
+            </a:r>
+          </a:p>
+          <a:p>
+            <a:pPr>
+              <a:spcAft>
+                <a:spcPts val="600"/>
+              </a:spcAft>
+            </a:pPr>
+            <a:r>
+              <a:rPr sz="1500">
+                <a:solidFill>
+                  <a:srgbClr val="22282E"/>
+                </a:solidFill>
+              </a:rPr>
+              <a:t>•  Criterio de aceptación: el número obtenido con cyclic -l coincide con 64 + 8 (buffer + saved RBP)</a:t>
+            </a:r>
+          </a:p>
+          <a:p>
+            <a:pPr>
+              <a:spcAft>
+                <a:spcPts val="600"/>
+              </a:spcAft>
+            </a:pPr>
+            <a:r>
+              <a:rPr sz="1500">
+                <a:solidFill>
+                  <a:srgbClr val="22282E"/>
+                </a:solidFill>
+              </a:rPr>
+              <a:t>•  y lo justificas con la vista de context.</a:t>
             </a:r>
           </a:p>
         </p:txBody>
@@ -3496,7 +3499,7 @@
                   <a:srgbClr val="0B3D2E"/>
                 </a:solidFill>
               </a:rPr>
-              <a:t>🔗 Referencias</a:t>
+              <a:t>⚠️ Errores comunes</a:t>
             </a:r>
           </a:p>
         </p:txBody>
@@ -3534,6 +3537,304 @@
                   <a:srgbClr val="22282E"/>
                 </a:solidFill>
               </a:rPr>
+              <a:t>•  pwndbg no aparece — source no cargado; revisa ~/.gdbinit o reejecuta setup.sh</a:t>
+            </a:r>
+          </a:p>
+          <a:p>
+            <a:pPr>
+              <a:spcAft>
+                <a:spcPts val="600"/>
+              </a:spcAft>
+            </a:pPr>
+            <a:r>
+              <a:rPr sz="1500">
+                <a:solidFill>
+                  <a:srgbClr val="22282E"/>
+                </a:solidFill>
+              </a:rPr>
+              <a:t>•  cyclic -l da "not found" — Pasaste el valor equivocado; usa el que quedó en RIP/RSP</a:t>
+            </a:r>
+          </a:p>
+          <a:p>
+            <a:pPr>
+              <a:spcAft>
+                <a:spcPts val="600"/>
+              </a:spcAft>
+            </a:pPr>
+            <a:r>
+              <a:rPr sz="1500">
+                <a:solidFill>
+                  <a:srgbClr val="22282E"/>
+                </a:solidFill>
+              </a:rPr>
+              <a:t>•  Direcciones cambian cada corrida — ASLR activo; desactívalo o depura dentro de GDB</a:t>
+            </a:r>
+          </a:p>
+          <a:p>
+            <a:pPr>
+              <a:spcAft>
+                <a:spcPts val="600"/>
+              </a:spcAft>
+            </a:pPr>
+            <a:r>
+              <a:rPr sz="1500">
+                <a:solidFill>
+                  <a:srgbClr val="22282E"/>
+                </a:solidFill>
+              </a:rPr>
+              <a:t>•  x/s imprime basura — Formato incorrecto; ese puntero no apunta a una cadena</a:t>
+            </a:r>
+          </a:p>
+          <a:p>
+            <a:pPr>
+              <a:spcAft>
+                <a:spcPts val="600"/>
+              </a:spcAft>
+            </a:pPr>
+            <a:r>
+              <a:rPr sz="1500">
+                <a:solidFill>
+                  <a:srgbClr val="22282E"/>
+                </a:solidFill>
+              </a:rPr>
+              <a:t>•  El breakpoint nunca dispara — Símbolo inexistente o binario recompilado; rompe por dirección</a:t>
+            </a:r>
+          </a:p>
+        </p:txBody>
+      </p:sp>
+    </p:spTree>
+  </p:cSld>
+  <p:clrMapOvr>
+    <a:masterClrMapping/>
+  </p:clrMapOvr>
+</p:sld>
+</file>
+
+<file path=ppt/slides/slide13.xml><?xml version="1.0" encoding="utf-8"?>
+<p:sld xmlns:a="http://schemas.openxmlformats.org/drawingml/2006/main" xmlns:p="http://schemas.openxmlformats.org/presentationml/2006/main" xmlns:r="http://schemas.openxmlformats.org/officeDocument/2006/relationships">
+  <p:cSld>
+    <p:spTree>
+      <p:nvGrpSpPr>
+        <p:cNvPr id="1" name=""/>
+        <p:cNvGrpSpPr/>
+        <p:nvPr/>
+      </p:nvGrpSpPr>
+      <p:grpSpPr/>
+      <p:sp>
+        <p:nvSpPr>
+          <p:cNvPr id="2" name="TextBox 1"/>
+          <p:cNvSpPr txBox="1"/>
+          <p:nvPr/>
+        </p:nvSpPr>
+        <p:spPr>
+          <a:xfrm>
+            <a:off x="457200" y="320040"/>
+            <a:ext cx="8229600" cy="822960"/>
+          </a:xfrm>
+          <a:prstGeom prst="rect">
+            <a:avLst/>
+          </a:prstGeom>
+          <a:noFill/>
+        </p:spPr>
+        <p:txBody>
+          <a:bodyPr wrap="square">
+            <a:spAutoFit/>
+          </a:bodyPr>
+          <a:lstStyle/>
+          <a:p>
+            <a:r>
+              <a:rPr sz="2600" b="1">
+                <a:solidFill>
+                  <a:srgbClr val="0B3D2E"/>
+                </a:solidFill>
+              </a:rPr>
+              <a:t>❓ Preguntas frecuentes</a:t>
+            </a:r>
+          </a:p>
+        </p:txBody>
+      </p:sp>
+      <p:sp>
+        <p:nvSpPr>
+          <p:cNvPr id="3" name="TextBox 2"/>
+          <p:cNvSpPr txBox="1"/>
+          <p:nvPr/>
+        </p:nvSpPr>
+        <p:spPr>
+          <a:xfrm>
+            <a:off x="457200" y="1280160"/>
+            <a:ext cx="8229600" cy="4937760"/>
+          </a:xfrm>
+          <a:prstGeom prst="rect">
+            <a:avLst/>
+          </a:prstGeom>
+          <a:noFill/>
+        </p:spPr>
+        <p:txBody>
+          <a:bodyPr wrap="square">
+            <a:spAutoFit/>
+          </a:bodyPr>
+          <a:lstStyle/>
+          <a:p>
+            <a:pPr>
+              <a:spcAft>
+                <a:spcPts val="600"/>
+              </a:spcAft>
+            </a:pPr>
+            <a:r>
+              <a:rPr sz="1500">
+                <a:solidFill>
+                  <a:srgbClr val="22282E"/>
+                </a:solidFill>
+              </a:rPr>
+              <a:t>•  ❓ ¿pwndbg, GEF o peda? Cualquiera sirve; pwndbg es el más usado hoy. No mezcles dos a la vez.</a:t>
+            </a:r>
+          </a:p>
+          <a:p>
+            <a:pPr>
+              <a:spcAft>
+                <a:spcPts val="600"/>
+              </a:spcAft>
+            </a:pPr>
+            <a:r>
+              <a:rPr sz="1500">
+                <a:solidFill>
+                  <a:srgbClr val="22282E"/>
+                </a:solidFill>
+              </a:rPr>
+              <a:t>•  ❓ ¿Por qué desactivo ASLR para aprender? Para que las direcciones sean estables entre corridas.</a:t>
+            </a:r>
+          </a:p>
+          <a:p>
+            <a:pPr>
+              <a:spcAft>
+                <a:spcPts val="600"/>
+              </a:spcAft>
+            </a:pPr>
+            <a:r>
+              <a:rPr sz="1500">
+                <a:solidFill>
+                  <a:srgbClr val="22282E"/>
+                </a:solidFill>
+              </a:rPr>
+              <a:t>•  En la explotación real lo tratarás como obstáculo (clases 122+).</a:t>
+            </a:r>
+          </a:p>
+          <a:p>
+            <a:pPr>
+              <a:spcAft>
+                <a:spcPts val="600"/>
+              </a:spcAft>
+            </a:pPr>
+            <a:r>
+              <a:rPr sz="1500">
+                <a:solidFill>
+                  <a:srgbClr val="22282E"/>
+                </a:solidFill>
+              </a:rPr>
+              <a:t>•  ❓ ¿gets es realista? Es un ejemplo didáctico; en binarios reales verás strcpy, sprintf,</a:t>
+            </a:r>
+          </a:p>
+          <a:p>
+            <a:pPr>
+              <a:spcAft>
+                <a:spcPts val="600"/>
+              </a:spcAft>
+            </a:pPr>
+            <a:r>
+              <a:rPr sz="1500">
+                <a:solidFill>
+                  <a:srgbClr val="22282E"/>
+                </a:solidFill>
+              </a:rPr>
+              <a:t>•  read mal acotados, etc.</a:t>
+            </a:r>
+          </a:p>
+        </p:txBody>
+      </p:sp>
+    </p:spTree>
+  </p:cSld>
+  <p:clrMapOvr>
+    <a:masterClrMapping/>
+  </p:clrMapOvr>
+</p:sld>
+</file>
+
+<file path=ppt/slides/slide14.xml><?xml version="1.0" encoding="utf-8"?>
+<p:sld xmlns:a="http://schemas.openxmlformats.org/drawingml/2006/main" xmlns:p="http://schemas.openxmlformats.org/presentationml/2006/main" xmlns:r="http://schemas.openxmlformats.org/officeDocument/2006/relationships">
+  <p:cSld>
+    <p:spTree>
+      <p:nvGrpSpPr>
+        <p:cNvPr id="1" name=""/>
+        <p:cNvGrpSpPr/>
+        <p:nvPr/>
+      </p:nvGrpSpPr>
+      <p:grpSpPr/>
+      <p:sp>
+        <p:nvSpPr>
+          <p:cNvPr id="2" name="TextBox 1"/>
+          <p:cNvSpPr txBox="1"/>
+          <p:nvPr/>
+        </p:nvSpPr>
+        <p:spPr>
+          <a:xfrm>
+            <a:off x="457200" y="320040"/>
+            <a:ext cx="8229600" cy="822960"/>
+          </a:xfrm>
+          <a:prstGeom prst="rect">
+            <a:avLst/>
+          </a:prstGeom>
+          <a:noFill/>
+        </p:spPr>
+        <p:txBody>
+          <a:bodyPr wrap="square">
+            <a:spAutoFit/>
+          </a:bodyPr>
+          <a:lstStyle/>
+          <a:p>
+            <a:r>
+              <a:rPr sz="2600" b="1">
+                <a:solidFill>
+                  <a:srgbClr val="0B3D2E"/>
+                </a:solidFill>
+              </a:rPr>
+              <a:t>🔗 Referencias</a:t>
+            </a:r>
+          </a:p>
+        </p:txBody>
+      </p:sp>
+      <p:sp>
+        <p:nvSpPr>
+          <p:cNvPr id="3" name="TextBox 2"/>
+          <p:cNvSpPr txBox="1"/>
+          <p:nvPr/>
+        </p:nvSpPr>
+        <p:spPr>
+          <a:xfrm>
+            <a:off x="457200" y="1280160"/>
+            <a:ext cx="8229600" cy="4937760"/>
+          </a:xfrm>
+          <a:prstGeom prst="rect">
+            <a:avLst/>
+          </a:prstGeom>
+          <a:noFill/>
+        </p:spPr>
+        <p:txBody>
+          <a:bodyPr wrap="square">
+            <a:spAutoFit/>
+          </a:bodyPr>
+          <a:lstStyle/>
+          <a:p>
+            <a:pPr>
+              <a:spcAft>
+                <a:spcPts val="600"/>
+              </a:spcAft>
+            </a:pPr>
+            <a:r>
+              <a:rPr sz="1500">
+                <a:solidFill>
+                  <a:srgbClr val="22282E"/>
+                </a:solidFill>
+              </a:rPr>
               <a:t>•  pwndbg — documentación oficial — &lt;https://github.com/pwndbg/pwndbg&gt;</a:t>
             </a:r>
           </a:p>
@@ -3584,6 +3885,81 @@
           </a:p>
         </p:txBody>
       </p:sp>
+    </p:spTree>
+  </p:cSld>
+  <p:clrMapOvr>
+    <a:masterClrMapping/>
+  </p:clrMapOvr>
+</p:sld>
+</file>
+
+<file path=ppt/slides/slide15.xml><?xml version="1.0" encoding="utf-8"?>
+<p:sld xmlns:a="http://schemas.openxmlformats.org/drawingml/2006/main" xmlns:p="http://schemas.openxmlformats.org/presentationml/2006/main" xmlns:r="http://schemas.openxmlformats.org/officeDocument/2006/relationships">
+  <p:cSld>
+    <p:spTree>
+      <p:nvGrpSpPr>
+        <p:cNvPr id="1" name=""/>
+        <p:cNvGrpSpPr/>
+        <p:nvPr/>
+      </p:nvGrpSpPr>
+      <p:grpSpPr/>
+      <p:sp>
+        <p:nvSpPr>
+          <p:cNvPr id="2" name="TextBox 1"/>
+          <p:cNvSpPr txBox="1"/>
+          <p:nvPr/>
+        </p:nvSpPr>
+        <p:spPr>
+          <a:xfrm>
+            <a:off x="457200" y="274320"/>
+            <a:ext cx="8229600" cy="640080"/>
+          </a:xfrm>
+          <a:prstGeom prst="rect">
+            <a:avLst/>
+          </a:prstGeom>
+          <a:noFill/>
+        </p:spPr>
+        <p:txBody>
+          <a:bodyPr wrap="square">
+            <a:spAutoFit/>
+          </a:bodyPr>
+          <a:lstStyle/>
+          <a:p>
+            <a:r>
+              <a:rPr sz="2200" b="1">
+                <a:solidFill>
+                  <a:srgbClr val="0B3D2E"/>
+                </a:solidFill>
+              </a:rPr>
+              <a:t>Diagrama de la clase</a:t>
+            </a:r>
+          </a:p>
+        </p:txBody>
+      </p:sp>
+      <p:pic>
+        <p:nvPicPr>
+          <p:cNvPr id="3" name="Picture 2" descr="af38057759f0344b.png"/>
+          <p:cNvPicPr>
+            <a:picLocks noChangeAspect="1"/>
+          </p:cNvPicPr>
+          <p:nvPr/>
+        </p:nvPicPr>
+        <p:blipFill>
+          <a:blip r:embed="rId2"/>
+          <a:stretch>
+            <a:fillRect/>
+          </a:stretch>
+        </p:blipFill>
+        <p:spPr>
+          <a:xfrm>
+            <a:off x="2611872" y="1097280"/>
+            <a:ext cx="3920255" cy="5303520"/>
+          </a:xfrm>
+          <a:prstGeom prst="rect">
+            <a:avLst/>
+          </a:prstGeom>
+        </p:spPr>
+      </p:pic>
     </p:spTree>
   </p:cSld>
   <p:clrMapOvr>
@@ -4107,7 +4483,7 @@
                   <a:srgbClr val="0B3D2E"/>
                 </a:solidFill>
               </a:rPr>
-              <a:t>📖 Definiciones y características</a:t>
+              <a:t>🧠 Explicación en profundidad</a:t>
             </a:r>
           </a:p>
         </p:txBody>
@@ -4145,97 +4521,97 @@
                   <a:srgbClr val="22282E"/>
                 </a:solidFill>
               </a:rPr>
-              <a:t>•  pwndbg: plugin de GDB orientado a explotación que muestra automáticamente el contexto en cada</a:t>
-            </a:r>
-          </a:p>
-          <a:p>
-            <a:pPr>
-              <a:spcAft>
-                <a:spcPts val="600"/>
-              </a:spcAft>
-            </a:pPr>
-            <a:r>
-              <a:rPr sz="1500">
-                <a:solidFill>
-                  <a:srgbClr val="22282E"/>
-                </a:solidFill>
-              </a:rPr>
-              <a:t>•  parada. Clave: alternativas equivalentes son GEF y peda.</a:t>
-            </a:r>
-          </a:p>
-          <a:p>
-            <a:pPr>
-              <a:spcAft>
-                <a:spcPts val="600"/>
-              </a:spcAft>
-            </a:pPr>
-            <a:r>
-              <a:rPr sz="1500">
-                <a:solidFill>
-                  <a:srgbClr val="22282E"/>
-                </a:solidFill>
-              </a:rPr>
-              <a:t>•  Breakpoint: punto donde el programa se detiene. Clave: break 0x401136 rompe en una dirección exacta.</a:t>
-            </a:r>
-          </a:p>
-          <a:p>
-            <a:pPr>
-              <a:spcAft>
-                <a:spcPts val="600"/>
-              </a:spcAft>
-            </a:pPr>
-            <a:r>
-              <a:rPr sz="1500">
-                <a:solidFill>
-                  <a:srgbClr val="22282E"/>
-                </a:solidFill>
-              </a:rPr>
-              <a:t>•  Watchpoint: detiene cuando cambia el valor de una expresión/memoria. Clave: ideal para ver</a:t>
-            </a:r>
-          </a:p>
-          <a:p>
-            <a:pPr>
-              <a:spcAft>
-                <a:spcPts val="600"/>
-              </a:spcAft>
-            </a:pPr>
-            <a:r>
-              <a:rPr sz="1500">
-                <a:solidFill>
-                  <a:srgbClr val="22282E"/>
-                </a:solidFill>
-              </a:rPr>
-              <a:t>•  cuándo se corrompe una variable.</a:t>
-            </a:r>
-          </a:p>
-          <a:p>
-            <a:pPr>
-              <a:spcAft>
-                <a:spcPts val="600"/>
-              </a:spcAft>
-            </a:pPr>
-            <a:r>
-              <a:rPr sz="1500">
-                <a:solidFill>
-                  <a:srgbClr val="22282E"/>
-                </a:solidFill>
-              </a:rPr>
-              <a:t>•  x/ (examine): vuelca memoria con formato (x/16gx $rsp = 16 giant hex desde RSP). Clave: la</a:t>
-            </a:r>
-          </a:p>
-          <a:p>
-            <a:pPr>
-              <a:spcAft>
-                <a:spcPts val="600"/>
-              </a:spcAft>
-            </a:pPr>
-            <a:r>
-              <a:rPr sz="1500">
-                <a:solidFill>
-                  <a:srgbClr val="22282E"/>
-                </a:solidFill>
-              </a:rPr>
-              <a:t>•  letra final es el tamaño (b/h/w/g) y la anterior el formato (x/d/i/s).</a:t>
+              <a:t>•  No se puede escribir un exploit a ciegas: hace falta ver el estado de la CPU y de la memoria en</a:t>
+            </a:r>
+          </a:p>
+          <a:p>
+            <a:pPr>
+              <a:spcAft>
+                <a:spcPts val="600"/>
+              </a:spcAft>
+            </a:pPr>
+            <a:r>
+              <a:rPr sz="1500">
+                <a:solidFill>
+                  <a:srgbClr val="22282E"/>
+                </a:solidFill>
+              </a:rPr>
+              <a:t>•  cada instante —qué hay en los registros, qué contiene la pila, dónde está cargada cada región—.</a:t>
+            </a:r>
+          </a:p>
+          <a:p>
+            <a:pPr>
+              <a:spcAft>
+                <a:spcPts val="600"/>
+              </a:spcAft>
+            </a:pPr>
+            <a:r>
+              <a:rPr sz="1500">
+                <a:solidFill>
+                  <a:srgbClr val="22282E"/>
+                </a:solidFill>
+              </a:rPr>
+              <a:t>•  GDB es el depurador estándar de Linux, y pwndbg es una extensión que lo transforma en una</a:t>
+            </a:r>
+          </a:p>
+          <a:p>
+            <a:pPr>
+              <a:spcAft>
+                <a:spcPts val="600"/>
+              </a:spcAft>
+            </a:pPr>
+            <a:r>
+              <a:rPr sz="1500">
+                <a:solidFill>
+                  <a:srgbClr val="22282E"/>
+                </a:solidFill>
+              </a:rPr>
+              <a:t>•  herramienta pensada para el exploiting: en cada parada muestra automáticamente los registros, el</a:t>
+            </a:r>
+          </a:p>
+          <a:p>
+            <a:pPr>
+              <a:spcAft>
+                <a:spcPts val="600"/>
+              </a:spcAft>
+            </a:pPr>
+            <a:r>
+              <a:rPr sz="1500">
+                <a:solidFill>
+                  <a:srgbClr val="22282E"/>
+                </a:solidFill>
+              </a:rPr>
+              <a:t>•  desensamblado, la pila y las banderas, con colores que distinguen código, datos y punteros.</a:t>
+            </a:r>
+          </a:p>
+          <a:p>
+            <a:pPr>
+              <a:spcAft>
+                <a:spcPts val="600"/>
+              </a:spcAft>
+            </a:pPr>
+            <a:r>
+              <a:rPr sz="1500">
+                <a:solidFill>
+                  <a:srgbClr val="22282E"/>
+                </a:solidFill>
+              </a:rPr>
+              <a:t>•  Dominar el depurador es, en la práctica, el 60% de aprender a explotar; el resto es saber qué</a:t>
+            </a:r>
+          </a:p>
+          <a:p>
+            <a:pPr>
+              <a:spcAft>
+                <a:spcPts val="600"/>
+              </a:spcAft>
+            </a:pPr>
+            <a:r>
+              <a:rPr sz="1500">
+                <a:solidFill>
+                  <a:srgbClr val="22282E"/>
+                </a:solidFill>
+              </a:rPr>
+              <a:t>•  buscar en lo que muestra.</a:t>
             </a:r>
           </a:p>
         </p:txBody>
@@ -4286,7 +4662,7 @@
                   <a:srgbClr val="0B3D2E"/>
                 </a:solidFill>
               </a:rPr>
-              <a:t>🧰 Herramientas y preparación</a:t>
+              <a:t>📖 Definiciones y características</a:t>
             </a:r>
           </a:p>
         </p:txBody>
@@ -4324,67 +4700,97 @@
                   <a:srgbClr val="22282E"/>
                 </a:solidFill>
               </a:rPr>
-              <a:t>•  git clone https://github.com/pwndbg/pwndbg</a:t>
-            </a:r>
-          </a:p>
-          <a:p>
-            <a:pPr>
-              <a:spcAft>
-                <a:spcPts val="600"/>
-              </a:spcAft>
-            </a:pPr>
-            <a:r>
-              <a:rPr sz="1500">
-                <a:solidFill>
-                  <a:srgbClr val="22282E"/>
-                </a:solidFill>
-              </a:rPr>
-              <a:t>•  cd pwndbg &amp;&amp; ./setup.sh</a:t>
-            </a:r>
-          </a:p>
-          <a:p>
-            <a:pPr>
-              <a:spcAft>
-                <a:spcPts val="600"/>
-              </a:spcAft>
-            </a:pPr>
-            <a:r>
-              <a:rPr sz="1500">
-                <a:solidFill>
-                  <a:srgbClr val="22282E"/>
-                </a:solidFill>
-              </a:rPr>
-              <a:t>•  echo "quit" | gdb -q ./frame   # debe mostrar la cabecera pwndbg</a:t>
-            </a:r>
-          </a:p>
-          <a:p>
-            <a:pPr>
-              <a:spcAft>
-                <a:spcPts val="600"/>
-              </a:spcAft>
-            </a:pPr>
-            <a:r>
-              <a:rPr sz="1500">
-                <a:solidFill>
-                  <a:srgbClr val="22282E"/>
-                </a:solidFill>
-              </a:rPr>
-              <a:t>•  Para reproducibilidad al aprender, desactiva ASLR solo dentro de GDB (pwndbg lo hace por defecto)</a:t>
-            </a:r>
-          </a:p>
-          <a:p>
-            <a:pPr>
-              <a:spcAft>
-                <a:spcPts val="600"/>
-              </a:spcAft>
-            </a:pPr>
-            <a:r>
-              <a:rPr sz="1500">
-                <a:solidFill>
-                  <a:srgbClr val="22282E"/>
-                </a:solidFill>
-              </a:rPr>
-              <a:t>•  o globalmente en la VM: echo 0 | sudo tee /proc/sys/kernel/randomizevaspace (revierte a 2 después).</a:t>
+              <a:t>•  pwndbg: plugin de GDB orientado a explotación que muestra automáticamente el contexto en cada</a:t>
+            </a:r>
+          </a:p>
+          <a:p>
+            <a:pPr>
+              <a:spcAft>
+                <a:spcPts val="600"/>
+              </a:spcAft>
+            </a:pPr>
+            <a:r>
+              <a:rPr sz="1500">
+                <a:solidFill>
+                  <a:srgbClr val="22282E"/>
+                </a:solidFill>
+              </a:rPr>
+              <a:t>•  parada. Clave: alternativas equivalentes son GEF y peda.</a:t>
+            </a:r>
+          </a:p>
+          <a:p>
+            <a:pPr>
+              <a:spcAft>
+                <a:spcPts val="600"/>
+              </a:spcAft>
+            </a:pPr>
+            <a:r>
+              <a:rPr sz="1500">
+                <a:solidFill>
+                  <a:srgbClr val="22282E"/>
+                </a:solidFill>
+              </a:rPr>
+              <a:t>•  Breakpoint: punto donde el programa se detiene. Clave: break 0x401136 rompe en una dirección exacta.</a:t>
+            </a:r>
+          </a:p>
+          <a:p>
+            <a:pPr>
+              <a:spcAft>
+                <a:spcPts val="600"/>
+              </a:spcAft>
+            </a:pPr>
+            <a:r>
+              <a:rPr sz="1500">
+                <a:solidFill>
+                  <a:srgbClr val="22282E"/>
+                </a:solidFill>
+              </a:rPr>
+              <a:t>•  Watchpoint: detiene cuando cambia el valor de una expresión/memoria. Clave: ideal para ver</a:t>
+            </a:r>
+          </a:p>
+          <a:p>
+            <a:pPr>
+              <a:spcAft>
+                <a:spcPts val="600"/>
+              </a:spcAft>
+            </a:pPr>
+            <a:r>
+              <a:rPr sz="1500">
+                <a:solidFill>
+                  <a:srgbClr val="22282E"/>
+                </a:solidFill>
+              </a:rPr>
+              <a:t>•  cuándo se corrompe una variable.</a:t>
+            </a:r>
+          </a:p>
+          <a:p>
+            <a:pPr>
+              <a:spcAft>
+                <a:spcPts val="600"/>
+              </a:spcAft>
+            </a:pPr>
+            <a:r>
+              <a:rPr sz="1500">
+                <a:solidFill>
+                  <a:srgbClr val="22282E"/>
+                </a:solidFill>
+              </a:rPr>
+              <a:t>•  x/ (examine): vuelca memoria con formato (x/16gx $rsp = 16 giant hex desde RSP). Clave: la</a:t>
+            </a:r>
+          </a:p>
+          <a:p>
+            <a:pPr>
+              <a:spcAft>
+                <a:spcPts val="600"/>
+              </a:spcAft>
+            </a:pPr>
+            <a:r>
+              <a:rPr sz="1500">
+                <a:solidFill>
+                  <a:srgbClr val="22282E"/>
+                </a:solidFill>
+              </a:rPr>
+              <a:t>•  letra final es el tamaño (b/h/w/g) y la anterior el formato (x/d/i/s).</a:t>
             </a:r>
           </a:p>
         </p:txBody>
@@ -4435,7 +4841,7 @@
                   <a:srgbClr val="0B3D2E"/>
                 </a:solidFill>
               </a:rPr>
-              <a:t>🧪 Laboratorio guiado</a:t>
+              <a:t>📔 Glosario</a:t>
             </a:r>
           </a:p>
         </p:txBody>
@@ -4473,97 +4879,97 @@
                   <a:srgbClr val="22282E"/>
                 </a:solidFill>
               </a:rPr>
-              <a:t>•  Compila un binario vulnerable de prueba (sin protecciones, solo para práctica):</a:t>
-            </a:r>
-          </a:p>
-          <a:p>
-            <a:pPr>
-              <a:spcAft>
-                <a:spcPts val="600"/>
-              </a:spcAft>
-            </a:pPr>
-            <a:r>
-              <a:rPr sz="1500">
-                <a:solidFill>
-                  <a:srgbClr val="22282E"/>
-                </a:solidFill>
-              </a:rPr>
-              <a:t>•  // vuln.c</a:t>
-            </a:r>
-          </a:p>
-          <a:p>
-            <a:pPr>
-              <a:spcAft>
-                <a:spcPts val="600"/>
-              </a:spcAft>
-            </a:pPr>
-            <a:r>
-              <a:rPr sz="1500">
-                <a:solidFill>
-                  <a:srgbClr val="22282E"/>
-                </a:solidFill>
-              </a:rPr>
-              <a:t>•  void win() { puts("¡controlaste el flujo!"); }</a:t>
-            </a:r>
-          </a:p>
-          <a:p>
-            <a:pPr>
-              <a:spcAft>
-                <a:spcPts val="600"/>
-              </a:spcAft>
-            </a:pPr>
-            <a:r>
-              <a:rPr sz="1500">
-                <a:solidFill>
-                  <a:srgbClr val="22282E"/>
-                </a:solidFill>
-              </a:rPr>
-              <a:t>•  void vuln() { char buf[64]; gets(buf); }</a:t>
-            </a:r>
-          </a:p>
-          <a:p>
-            <a:pPr>
-              <a:spcAft>
-                <a:spcPts val="600"/>
-              </a:spcAft>
-            </a:pPr>
-            <a:r>
-              <a:rPr sz="1500">
-                <a:solidFill>
-                  <a:srgbClr val="22282E"/>
-                </a:solidFill>
-              </a:rPr>
-              <a:t>•  int main(){ vuln(); return 0; }</a:t>
-            </a:r>
-          </a:p>
-          <a:p>
-            <a:pPr>
-              <a:spcAft>
-                <a:spcPts val="600"/>
-              </a:spcAft>
-            </a:pPr>
-            <a:r>
-              <a:rPr sz="1500">
-                <a:solidFill>
-                  <a:srgbClr val="22282E"/>
-                </a:solidFill>
-              </a:rPr>
-              <a:t>•  gcc -fno-stack-protector -no-pie -z execstack vuln.c -o vuln   # solo laboratorio</a:t>
-            </a:r>
-          </a:p>
-          <a:p>
-            <a:pPr>
-              <a:spcAft>
-                <a:spcPts val="600"/>
-              </a:spcAft>
-            </a:pPr>
-            <a:r>
-              <a:rPr sz="1500">
-                <a:solidFill>
-                  <a:srgbClr val="22282E"/>
-                </a:solidFill>
-              </a:rPr>
-              <a:t>•  Arranca en pwndbg: gdb -q ./vuln. Observa la cabecera y prueba context.</a:t>
+              <a:t>•  Término — Definición concisa</a:t>
+            </a:r>
+          </a:p>
+          <a:p>
+            <a:pPr>
+              <a:spcAft>
+                <a:spcPts val="600"/>
+              </a:spcAft>
+            </a:pPr>
+            <a:r>
+              <a:rPr sz="1500">
+                <a:solidFill>
+                  <a:srgbClr val="22282E"/>
+                </a:solidFill>
+              </a:rPr>
+              <a:t>•  GDB — Depurador estándar de Linux</a:t>
+            </a:r>
+          </a:p>
+          <a:p>
+            <a:pPr>
+              <a:spcAft>
+                <a:spcPts val="600"/>
+              </a:spcAft>
+            </a:pPr>
+            <a:r>
+              <a:rPr sz="1500">
+                <a:solidFill>
+                  <a:srgbClr val="22282E"/>
+                </a:solidFill>
+              </a:rPr>
+              <a:t>•  pwndbg — Extensión de GDB orientada al exploiting</a:t>
+            </a:r>
+          </a:p>
+          <a:p>
+            <a:pPr>
+              <a:spcAft>
+                <a:spcPts val="600"/>
+              </a:spcAft>
+            </a:pPr>
+            <a:r>
+              <a:rPr sz="1500">
+                <a:solidFill>
+                  <a:srgbClr val="22282E"/>
+                </a:solidFill>
+              </a:rPr>
+              <a:t>•  context — Vista de pwndbg con registros, pila y desensamblado</a:t>
+            </a:r>
+          </a:p>
+          <a:p>
+            <a:pPr>
+              <a:spcAft>
+                <a:spcPts val="600"/>
+              </a:spcAft>
+            </a:pPr>
+            <a:r>
+              <a:rPr sz="1500">
+                <a:solidFill>
+                  <a:srgbClr val="22282E"/>
+                </a:solidFill>
+              </a:rPr>
+              <a:t>•  Breakpoint — Pausa la ejecución al llegar a un punto</a:t>
+            </a:r>
+          </a:p>
+          <a:p>
+            <a:pPr>
+              <a:spcAft>
+                <a:spcPts val="600"/>
+              </a:spcAft>
+            </a:pPr>
+            <a:r>
+              <a:rPr sz="1500">
+                <a:solidFill>
+                  <a:srgbClr val="22282E"/>
+                </a:solidFill>
+              </a:rPr>
+              <a:t>•  Watchpoint — Pausa cuando una posición de memoria cambia</a:t>
+            </a:r>
+          </a:p>
+          <a:p>
+            <a:pPr>
+              <a:spcAft>
+                <a:spcPts val="600"/>
+              </a:spcAft>
+            </a:pPr>
+            <a:r>
+              <a:rPr sz="1500">
+                <a:solidFill>
+                  <a:srgbClr val="22282E"/>
+                </a:solidFill>
+              </a:rPr>
+              <a:t>•  stepi / nexti — Ejecutar una instrucción entrando / pasando por encima</a:t>
             </a:r>
           </a:p>
         </p:txBody>
@@ -4614,7 +5020,7 @@
                   <a:srgbClr val="0B3D2E"/>
                 </a:solidFill>
               </a:rPr>
-              <a:t>✍️ Ejercicios</a:t>
+              <a:t>🧰 Herramientas y preparación</a:t>
             </a:r>
           </a:p>
         </p:txBody>
@@ -4652,82 +5058,22 @@
                   <a:srgbClr val="22282E"/>
                 </a:solidFill>
               </a:rPr>
-              <a:t>•  Muestra los 8 primeros qwords del stack con un solo comando x/.</a:t>
-            </a:r>
-          </a:p>
-          <a:p>
-            <a:pPr>
-              <a:spcAft>
-                <a:spcPts val="600"/>
-              </a:spcAft>
-            </a:pPr>
-            <a:r>
-              <a:rPr sz="1500">
-                <a:solidFill>
-                  <a:srgbClr val="22282E"/>
-                </a:solidFill>
-              </a:rPr>
-              <a:t>•  Coloca un watchpoint sobre buf y observa cuándo se sobreescribe.</a:t>
-            </a:r>
-          </a:p>
-          <a:p>
-            <a:pPr>
-              <a:spcAft>
-                <a:spcPts val="600"/>
-              </a:spcAft>
-            </a:pPr>
-            <a:r>
-              <a:rPr sz="1500">
-                <a:solidFill>
-                  <a:srgbClr val="22282E"/>
-                </a:solidFill>
-              </a:rPr>
-              <a:t>•  Usa search para encontrar la cadena "win" en memoria.</a:t>
-            </a:r>
-          </a:p>
-          <a:p>
-            <a:pPr>
-              <a:spcAft>
-                <a:spcPts val="600"/>
-              </a:spcAft>
-            </a:pPr>
-            <a:r>
-              <a:rPr sz="1500">
-                <a:solidFill>
-                  <a:srgbClr val="22282E"/>
-                </a:solidFill>
-              </a:rPr>
-              <a:t>•  Desensambla vuln con disassemble vuln e identifica el call gets.</a:t>
-            </a:r>
-          </a:p>
-          <a:p>
-            <a:pPr>
-              <a:spcAft>
-                <a:spcPts val="600"/>
-              </a:spcAft>
-            </a:pPr>
-            <a:r>
-              <a:rPr sz="1500">
-                <a:solidFill>
-                  <a:srgbClr val="22282E"/>
-                </a:solidFill>
-              </a:rPr>
-              <a:t>•  Explica la diferencia entre stepi y nexti con call.</a:t>
-            </a:r>
-          </a:p>
-          <a:p>
-            <a:pPr>
-              <a:spcAft>
-                <a:spcPts val="600"/>
-              </a:spcAft>
-            </a:pPr>
-            <a:r>
-              <a:rPr sz="1500">
-                <a:solidFill>
-                  <a:srgbClr val="22282E"/>
-                </a:solidFill>
-              </a:rPr>
-              <a:t>•  Guarda un script .gdbinit con tus breakpoints habituales.</a:t>
+              <a:t>•  Para reproducibilidad al aprender, desactiva ASLR solo dentro de GDB (pwndbg lo hace por defecto)</a:t>
+            </a:r>
+          </a:p>
+          <a:p>
+            <a:pPr>
+              <a:spcAft>
+                <a:spcPts val="600"/>
+              </a:spcAft>
+            </a:pPr>
+            <a:r>
+              <a:rPr sz="1500">
+                <a:solidFill>
+                  <a:srgbClr val="22282E"/>
+                </a:solidFill>
+              </a:rPr>
+              <a:t>•  o globalmente en la VM: echo 0 | sudo tee /proc/sys/kernel/randomizevaspace (revierte a 2 después).</a:t>
             </a:r>
           </a:p>
         </p:txBody>
@@ -4778,7 +5124,7 @@
                   <a:srgbClr val="0B3D2E"/>
                 </a:solidFill>
               </a:rPr>
-              <a:t>📝 Reto verificable</a:t>
+              <a:t>🧪 Laboratorio guiado</a:t>
             </a:r>
           </a:p>
         </p:txBody>
@@ -4816,52 +5162,97 @@
                   <a:srgbClr val="22282E"/>
                 </a:solidFill>
               </a:rPr>
-              <a:t>•  Usando cyclic, determina el offset exacto (en bytes) desde el inicio de buf hasta la dirección de</a:t>
-            </a:r>
-          </a:p>
-          <a:p>
-            <a:pPr>
-              <a:spcAft>
-                <a:spcPts val="600"/>
-              </a:spcAft>
-            </a:pPr>
-            <a:r>
-              <a:rPr sz="1500">
-                <a:solidFill>
-                  <a:srgbClr val="22282E"/>
-                </a:solidFill>
-              </a:rPr>
-              <a:t>•  retorno de vuln.</a:t>
-            </a:r>
-          </a:p>
-          <a:p>
-            <a:pPr>
-              <a:spcAft>
-                <a:spcPts val="600"/>
-              </a:spcAft>
-            </a:pPr>
-            <a:r>
-              <a:rPr sz="1500">
-                <a:solidFill>
-                  <a:srgbClr val="22282E"/>
-                </a:solidFill>
-              </a:rPr>
-              <a:t>•  Criterio de aceptación: el número obtenido con cyclic -l coincide con 64 + 8 (buffer + saved RBP)</a:t>
-            </a:r>
-          </a:p>
-          <a:p>
-            <a:pPr>
-              <a:spcAft>
-                <a:spcPts val="600"/>
-              </a:spcAft>
-            </a:pPr>
-            <a:r>
-              <a:rPr sz="1500">
-                <a:solidFill>
-                  <a:srgbClr val="22282E"/>
-                </a:solidFill>
-              </a:rPr>
-              <a:t>•  y lo justificas con la vista de context.</a:t>
+              <a:t>•  Compila un binario vulnerable de prueba (sin protecciones, solo para práctica):</a:t>
+            </a:r>
+          </a:p>
+          <a:p>
+            <a:pPr>
+              <a:spcAft>
+                <a:spcPts val="600"/>
+              </a:spcAft>
+            </a:pPr>
+            <a:r>
+              <a:rPr sz="1500">
+                <a:solidFill>
+                  <a:srgbClr val="22282E"/>
+                </a:solidFill>
+              </a:rPr>
+              <a:t>•  Arranca en pwndbg: gdb -q ./vuln. Observa la cabecera y prueba context.</a:t>
+            </a:r>
+          </a:p>
+          <a:p>
+            <a:pPr>
+              <a:spcAft>
+                <a:spcPts val="600"/>
+              </a:spcAft>
+            </a:pPr>
+            <a:r>
+              <a:rPr sz="1500">
+                <a:solidFill>
+                  <a:srgbClr val="22282E"/>
+                </a:solidFill>
+              </a:rPr>
+              <a:t>•  Genera un patrón y aliméntalo:</a:t>
+            </a:r>
+          </a:p>
+          <a:p>
+            <a:pPr>
+              <a:spcAft>
+                <a:spcPts val="600"/>
+              </a:spcAft>
+            </a:pPr>
+            <a:r>
+              <a:rPr sz="1500">
+                <a:solidFill>
+                  <a:srgbClr val="22282E"/>
+                </a:solidFill>
+              </a:rPr>
+              <a:t>•  Al crashear, lee el valor que quedó en RIP/RSP y calcula el offset:</a:t>
+            </a:r>
+          </a:p>
+          <a:p>
+            <a:pPr>
+              <a:spcAft>
+                <a:spcPts val="600"/>
+              </a:spcAft>
+            </a:pPr>
+            <a:r>
+              <a:rPr sz="1500">
+                <a:solidFill>
+                  <a:srgbClr val="22282E"/>
+                </a:solidFill>
+              </a:rPr>
+              <a:t>•  Explora el proceso: vmmap, telescope $rsp 20, info functions win para conocer la dirección de win.</a:t>
+            </a:r>
+          </a:p>
+          <a:p>
+            <a:pPr>
+              <a:spcAft>
+                <a:spcPts val="600"/>
+              </a:spcAft>
+            </a:pPr>
+            <a:r>
+              <a:rPr sz="1500">
+                <a:solidFill>
+                  <a:srgbClr val="22282E"/>
+                </a:solidFill>
+              </a:rPr>
+              <a:t>•  Pon un breakpoint en vuln y avanza con nexti observando cómo RSP/RBP cambian en el prólogo.</a:t>
+            </a:r>
+          </a:p>
+          <a:p>
+            <a:pPr>
+              <a:spcAft>
+                <a:spcPts val="600"/>
+              </a:spcAft>
+            </a:pPr>
+            <a:r>
+              <a:rPr sz="1500">
+                <a:solidFill>
+                  <a:srgbClr val="22282E"/>
+                </a:solidFill>
+              </a:rPr>
+              <a:t>•  Anota el offset hallado: lo usarás en las clases 119–120 para redirigir la ejecución a win.</a:t>
             </a:r>
           </a:p>
         </p:txBody>
